--- a/Week_4/Service_Level_Management.pptx
+++ b/Week_4/Service_Level_Management.pptx
@@ -13,7 +13,8 @@
     <p:sldId id="383" r:id="rId7"/>
     <p:sldId id="384" r:id="rId8"/>
     <p:sldId id="385" r:id="rId9"/>
-    <p:sldId id="378" r:id="rId10"/>
+    <p:sldId id="386" r:id="rId10"/>
+    <p:sldId id="378" r:id="rId11"/>
   </p:sldIdLst>
   <p:sldSz cx="12192000" cy="6858000"/>
   <p:notesSz cx="6858000" cy="9144000"/>
@@ -380,7 +381,7 @@
             <a:fld id="{B61BEF0D-F0BB-DE4B-95CE-6DB70DBA9567}" type="datetimeFigureOut">
               <a:rPr lang="en-US" dirty="0"/>
               <a:pPr/>
-              <a:t>10/16/2025</a:t>
+              <a:t>10/17/2025</a:t>
             </a:fld>
             <a:endParaRPr lang="en-US" dirty="0"/>
           </a:p>
@@ -642,7 +643,7 @@
             <a:fld id="{B61BEF0D-F0BB-DE4B-95CE-6DB70DBA9567}" type="datetimeFigureOut">
               <a:rPr lang="en-US" dirty="0"/>
               <a:pPr/>
-              <a:t>10/16/2025</a:t>
+              <a:t>10/17/2025</a:t>
             </a:fld>
             <a:endParaRPr lang="en-US" dirty="0"/>
           </a:p>
@@ -877,7 +878,7 @@
             <a:fld id="{B61BEF0D-F0BB-DE4B-95CE-6DB70DBA9567}" type="datetimeFigureOut">
               <a:rPr lang="en-US" dirty="0"/>
               <a:pPr/>
-              <a:t>10/16/2025</a:t>
+              <a:t>10/17/2025</a:t>
             </a:fld>
             <a:endParaRPr lang="en-US" dirty="0"/>
           </a:p>
@@ -1117,7 +1118,7 @@
             <a:fld id="{B61BEF0D-F0BB-DE4B-95CE-6DB70DBA9567}" type="datetimeFigureOut">
               <a:rPr lang="en-US" dirty="0"/>
               <a:pPr/>
-              <a:t>10/16/2025</a:t>
+              <a:t>10/17/2025</a:t>
             </a:fld>
             <a:endParaRPr lang="en-US" dirty="0"/>
           </a:p>
@@ -1425,7 +1426,7 @@
             <a:fld id="{B61BEF0D-F0BB-DE4B-95CE-6DB70DBA9567}" type="datetimeFigureOut">
               <a:rPr lang="en-US" dirty="0"/>
               <a:pPr/>
-              <a:t>10/16/2025</a:t>
+              <a:t>10/17/2025</a:t>
             </a:fld>
             <a:endParaRPr lang="en-US" dirty="0"/>
           </a:p>
@@ -1726,7 +1727,7 @@
             <a:fld id="{B61BEF0D-F0BB-DE4B-95CE-6DB70DBA9567}" type="datetimeFigureOut">
               <a:rPr lang="en-US" dirty="0"/>
               <a:pPr/>
-              <a:t>10/16/2025</a:t>
+              <a:t>10/17/2025</a:t>
             </a:fld>
             <a:endParaRPr lang="en-US" dirty="0"/>
           </a:p>
@@ -2147,7 +2148,7 @@
             <a:fld id="{B61BEF0D-F0BB-DE4B-95CE-6DB70DBA9567}" type="datetimeFigureOut">
               <a:rPr lang="en-US" dirty="0"/>
               <a:pPr/>
-              <a:t>10/16/2025</a:t>
+              <a:t>10/17/2025</a:t>
             </a:fld>
             <a:endParaRPr lang="en-US" dirty="0"/>
           </a:p>
@@ -2310,7 +2311,7 @@
             <a:fld id="{B61BEF0D-F0BB-DE4B-95CE-6DB70DBA9567}" type="datetimeFigureOut">
               <a:rPr lang="en-US" dirty="0"/>
               <a:pPr/>
-              <a:t>10/16/2025</a:t>
+              <a:t>10/17/2025</a:t>
             </a:fld>
             <a:endParaRPr lang="en-US" dirty="0"/>
           </a:p>
@@ -2407,7 +2408,7 @@
             <a:fld id="{B61BEF0D-F0BB-DE4B-95CE-6DB70DBA9567}" type="datetimeFigureOut">
               <a:rPr lang="en-US" dirty="0"/>
               <a:pPr/>
-              <a:t>10/16/2025</a:t>
+              <a:t>10/17/2025</a:t>
             </a:fld>
             <a:endParaRPr lang="en-US" dirty="0"/>
           </a:p>
@@ -2785,7 +2786,7 @@
             <a:fld id="{B61BEF0D-F0BB-DE4B-95CE-6DB70DBA9567}" type="datetimeFigureOut">
               <a:rPr lang="en-US" dirty="0"/>
               <a:pPr/>
-              <a:t>10/16/2025</a:t>
+              <a:t>10/17/2025</a:t>
             </a:fld>
             <a:endParaRPr lang="en-US" dirty="0"/>
           </a:p>
@@ -3071,7 +3072,7 @@
             <a:fld id="{B61BEF0D-F0BB-DE4B-95CE-6DB70DBA9567}" type="datetimeFigureOut">
               <a:rPr lang="en-US" dirty="0"/>
               <a:pPr/>
-              <a:t>10/16/2025</a:t>
+              <a:t>10/17/2025</a:t>
             </a:fld>
             <a:endParaRPr lang="en-US" dirty="0"/>
           </a:p>
@@ -3310,7 +3311,7 @@
             <a:fld id="{B61BEF0D-F0BB-DE4B-95CE-6DB70DBA9567}" type="datetimeFigureOut">
               <a:rPr lang="en-US" dirty="0"/>
               <a:pPr/>
-              <a:t>10/16/2025</a:t>
+              <a:t>10/17/2025</a:t>
             </a:fld>
             <a:endParaRPr lang="en-US" dirty="0"/>
           </a:p>
@@ -3968,6 +3969,421 @@
 </p:sld>
 </file>
 
+<file path=ppt/slides/slide10.xml><?xml version="1.0" encoding="utf-8"?>
+<p:sld xmlns:a="http://schemas.openxmlformats.org/drawingml/2006/main" xmlns:r="http://schemas.openxmlformats.org/officeDocument/2006/relationships" xmlns:p="http://schemas.openxmlformats.org/presentationml/2006/main">
+  <p:cSld>
+    <p:spTree>
+      <p:nvGrpSpPr>
+        <p:cNvPr id="1" name="">
+          <a:extLst>
+            <a:ext uri="{FF2B5EF4-FFF2-40B4-BE49-F238E27FC236}">
+              <a16:creationId xmlns:a16="http://schemas.microsoft.com/office/drawing/2014/main" id="{7367D0CA-F9AE-B516-2C0A-2E32C66DC8CD}"/>
+            </a:ext>
+          </a:extLst>
+        </p:cNvPr>
+        <p:cNvGrpSpPr/>
+        <p:nvPr/>
+      </p:nvGrpSpPr>
+      <p:grpSpPr>
+        <a:xfrm>
+          <a:off x="0" y="0"/>
+          <a:ext cx="0" cy="0"/>
+          <a:chOff x="0" y="0"/>
+          <a:chExt cx="0" cy="0"/>
+        </a:xfrm>
+      </p:grpSpPr>
+      <p:sp>
+        <p:nvSpPr>
+          <p:cNvPr id="2" name="Title 1">
+            <a:extLst>
+              <a:ext uri="{FF2B5EF4-FFF2-40B4-BE49-F238E27FC236}">
+                <a16:creationId xmlns:a16="http://schemas.microsoft.com/office/drawing/2014/main" id="{171FA3AC-F63D-52E2-BB9C-6ACFF627BEC8}"/>
+              </a:ext>
+            </a:extLst>
+          </p:cNvPr>
+          <p:cNvSpPr>
+            <a:spLocks noGrp="1"/>
+          </p:cNvSpPr>
+          <p:nvPr>
+            <p:ph type="title"/>
+          </p:nvPr>
+        </p:nvSpPr>
+        <p:spPr/>
+        <p:txBody>
+          <a:bodyPr/>
+          <a:lstStyle/>
+          <a:p>
+            <a:r>
+              <a:rPr lang="en-US" dirty="0"/>
+              <a:t>Challenge</a:t>
+            </a:r>
+          </a:p>
+        </p:txBody>
+      </p:sp>
+      <p:sp>
+        <p:nvSpPr>
+          <p:cNvPr id="3" name="Content Placeholder 2">
+            <a:extLst>
+              <a:ext uri="{FF2B5EF4-FFF2-40B4-BE49-F238E27FC236}">
+                <a16:creationId xmlns:a16="http://schemas.microsoft.com/office/drawing/2014/main" id="{83576976-544E-D66E-5CE1-3C91D93ED6AE}"/>
+              </a:ext>
+            </a:extLst>
+          </p:cNvPr>
+          <p:cNvSpPr>
+            <a:spLocks noGrp="1"/>
+          </p:cNvSpPr>
+          <p:nvPr>
+            <p:ph idx="1"/>
+          </p:nvPr>
+        </p:nvSpPr>
+        <p:spPr>
+          <a:xfrm>
+            <a:off x="6418730" y="2388699"/>
+            <a:ext cx="5192079" cy="3021895"/>
+          </a:xfrm>
+        </p:spPr>
+        <p:txBody>
+          <a:bodyPr>
+            <a:normAutofit fontScale="92500" lnSpcReduction="10000"/>
+          </a:bodyPr>
+          <a:lstStyle/>
+          <a:p>
+            <a:pPr marL="0" indent="0">
+              <a:buNone/>
+            </a:pPr>
+            <a:r>
+              <a:rPr lang="en-US" b="1" dirty="0"/>
+              <a:t>Scenario: </a:t>
+            </a:r>
+          </a:p>
+          <a:p>
+            <a:pPr marL="305435" indent="-305435"/>
+            <a:r>
+              <a:rPr lang="en-US" dirty="0">
+                <a:ea typeface="+mn-lt"/>
+                <a:cs typeface="+mn-lt"/>
+              </a:rPr>
+              <a:t>Create a Response and Resolution for priority 1 incidents</a:t>
+            </a:r>
+          </a:p>
+          <a:p>
+            <a:pPr marL="305435" indent="-305435"/>
+            <a:r>
+              <a:rPr lang="en-US" dirty="0">
+                <a:ea typeface="+mn-lt"/>
+                <a:cs typeface="+mn-lt"/>
+              </a:rPr>
+              <a:t>Response = 30 minutes</a:t>
+            </a:r>
+          </a:p>
+          <a:p>
+            <a:pPr marL="305435" indent="-305435"/>
+            <a:r>
+              <a:rPr lang="en-US" dirty="0">
+                <a:ea typeface="+mn-lt"/>
+                <a:cs typeface="+mn-lt"/>
+              </a:rPr>
+              <a:t>Resolution = 1 hour 30 minutes</a:t>
+            </a:r>
+          </a:p>
+          <a:p>
+            <a:pPr marL="305435" indent="-305435"/>
+            <a:r>
+              <a:rPr lang="en-US" dirty="0">
+                <a:ea typeface="+mn-lt"/>
+                <a:cs typeface="+mn-lt"/>
+              </a:rPr>
+              <a:t>Be sure to properly put the SLA on hold, and close it, when needed</a:t>
+            </a:r>
+            <a:endParaRPr lang="en-US" b="1" dirty="0">
+              <a:ea typeface="+mn-lt"/>
+              <a:cs typeface="+mn-lt"/>
+            </a:endParaRPr>
+          </a:p>
+          <a:p>
+            <a:pPr marL="305435" indent="-305435"/>
+            <a:r>
+              <a:rPr lang="en-US" dirty="0">
+                <a:ea typeface="+mn-lt"/>
+                <a:cs typeface="+mn-lt"/>
+              </a:rPr>
+              <a:t>Create a new 9-4 weekday schedule that excludes the nearest holiday (Diwali) </a:t>
+            </a:r>
+          </a:p>
+        </p:txBody>
+      </p:sp>
+      <p:sp>
+        <p:nvSpPr>
+          <p:cNvPr id="4" name="Content Placeholder 2">
+            <a:extLst>
+              <a:ext uri="{FF2B5EF4-FFF2-40B4-BE49-F238E27FC236}">
+                <a16:creationId xmlns:a16="http://schemas.microsoft.com/office/drawing/2014/main" id="{5278BB07-8A9D-0F81-F7D8-908F197B3356}"/>
+              </a:ext>
+            </a:extLst>
+          </p:cNvPr>
+          <p:cNvSpPr txBox="1">
+            <a:spLocks/>
+          </p:cNvSpPr>
+          <p:nvPr/>
+        </p:nvSpPr>
+        <p:spPr>
+          <a:xfrm>
+            <a:off x="903922" y="2415199"/>
+            <a:ext cx="4869350" cy="1484448"/>
+          </a:xfrm>
+          <a:prstGeom prst="rect">
+            <a:avLst/>
+          </a:prstGeom>
+        </p:spPr>
+        <p:txBody>
+          <a:bodyPr vert="horz" lIns="91440" tIns="45720" rIns="91440" bIns="45720" rtlCol="0" anchor="ctr">
+            <a:normAutofit/>
+          </a:bodyPr>
+          <a:lstStyle>
+            <a:lvl1pPr marL="306000" indent="-306000" algn="l" defTabSz="457200" rtl="0" eaLnBrk="1" latinLnBrk="0" hangingPunct="1">
+              <a:spcBef>
+                <a:spcPct val="20000"/>
+              </a:spcBef>
+              <a:spcAft>
+                <a:spcPts val="600"/>
+              </a:spcAft>
+              <a:buClr>
+                <a:schemeClr val="accent2"/>
+              </a:buClr>
+              <a:buSzPct val="92000"/>
+              <a:buFont typeface="Wingdings 2" panose="05020102010507070707" pitchFamily="18" charset="2"/>
+              <a:buChar char=""/>
+              <a:defRPr sz="1800" kern="1200">
+                <a:solidFill>
+                  <a:schemeClr val="tx2"/>
+                </a:solidFill>
+                <a:latin typeface="+mn-lt"/>
+                <a:ea typeface="+mn-ea"/>
+                <a:cs typeface="+mn-cs"/>
+              </a:defRPr>
+            </a:lvl1pPr>
+            <a:lvl2pPr marL="630000" indent="-306000" algn="l" defTabSz="457200" rtl="0" eaLnBrk="1" latinLnBrk="0" hangingPunct="1">
+              <a:spcBef>
+                <a:spcPct val="20000"/>
+              </a:spcBef>
+              <a:spcAft>
+                <a:spcPts val="600"/>
+              </a:spcAft>
+              <a:buClr>
+                <a:schemeClr val="accent2"/>
+              </a:buClr>
+              <a:buSzPct val="92000"/>
+              <a:buFont typeface="Wingdings 2" panose="05020102010507070707" pitchFamily="18" charset="2"/>
+              <a:buChar char=""/>
+              <a:defRPr sz="1600" kern="1200">
+                <a:solidFill>
+                  <a:schemeClr val="tx2"/>
+                </a:solidFill>
+                <a:latin typeface="+mn-lt"/>
+                <a:ea typeface="+mn-ea"/>
+                <a:cs typeface="+mn-cs"/>
+              </a:defRPr>
+            </a:lvl2pPr>
+            <a:lvl3pPr marL="900000" indent="-270000" algn="l" defTabSz="457200" rtl="0" eaLnBrk="1" latinLnBrk="0" hangingPunct="1">
+              <a:spcBef>
+                <a:spcPct val="20000"/>
+              </a:spcBef>
+              <a:spcAft>
+                <a:spcPts val="600"/>
+              </a:spcAft>
+              <a:buClr>
+                <a:schemeClr val="accent2"/>
+              </a:buClr>
+              <a:buSzPct val="92000"/>
+              <a:buFont typeface="Wingdings 2" panose="05020102010507070707" pitchFamily="18" charset="2"/>
+              <a:buChar char=""/>
+              <a:defRPr sz="1400" kern="1200">
+                <a:solidFill>
+                  <a:schemeClr val="tx2"/>
+                </a:solidFill>
+                <a:latin typeface="+mn-lt"/>
+                <a:ea typeface="+mn-ea"/>
+                <a:cs typeface="+mn-cs"/>
+              </a:defRPr>
+            </a:lvl3pPr>
+            <a:lvl4pPr marL="1242000" indent="-234000" algn="l" defTabSz="457200" rtl="0" eaLnBrk="1" latinLnBrk="0" hangingPunct="1">
+              <a:spcBef>
+                <a:spcPct val="20000"/>
+              </a:spcBef>
+              <a:spcAft>
+                <a:spcPts val="600"/>
+              </a:spcAft>
+              <a:buClr>
+                <a:schemeClr val="accent2"/>
+              </a:buClr>
+              <a:buSzPct val="92000"/>
+              <a:buFont typeface="Wingdings 2" panose="05020102010507070707" pitchFamily="18" charset="2"/>
+              <a:buChar char=""/>
+              <a:defRPr sz="1200" kern="1200">
+                <a:solidFill>
+                  <a:schemeClr val="tx2"/>
+                </a:solidFill>
+                <a:latin typeface="+mn-lt"/>
+                <a:ea typeface="+mn-ea"/>
+                <a:cs typeface="+mn-cs"/>
+              </a:defRPr>
+            </a:lvl4pPr>
+            <a:lvl5pPr marL="1602000" indent="-234000" algn="l" defTabSz="457200" rtl="0" eaLnBrk="1" latinLnBrk="0" hangingPunct="1">
+              <a:spcBef>
+                <a:spcPct val="20000"/>
+              </a:spcBef>
+              <a:spcAft>
+                <a:spcPts val="600"/>
+              </a:spcAft>
+              <a:buClr>
+                <a:schemeClr val="accent2"/>
+              </a:buClr>
+              <a:buSzPct val="92000"/>
+              <a:buFont typeface="Wingdings 2" panose="05020102010507070707" pitchFamily="18" charset="2"/>
+              <a:buChar char=""/>
+              <a:defRPr sz="1200" kern="1200">
+                <a:solidFill>
+                  <a:schemeClr val="tx2"/>
+                </a:solidFill>
+                <a:latin typeface="+mn-lt"/>
+                <a:ea typeface="+mn-ea"/>
+                <a:cs typeface="+mn-cs"/>
+              </a:defRPr>
+            </a:lvl5pPr>
+            <a:lvl6pPr marL="1900000" indent="-228600" algn="l" defTabSz="457200" rtl="0" eaLnBrk="1" latinLnBrk="0" hangingPunct="1">
+              <a:spcBef>
+                <a:spcPct val="20000"/>
+              </a:spcBef>
+              <a:spcAft>
+                <a:spcPts val="600"/>
+              </a:spcAft>
+              <a:buClr>
+                <a:schemeClr val="accent2"/>
+              </a:buClr>
+              <a:buSzPct val="92000"/>
+              <a:buFont typeface="Wingdings 2" panose="05020102010507070707" pitchFamily="18" charset="2"/>
+              <a:buChar char=""/>
+              <a:defRPr sz="1200" kern="1200">
+                <a:solidFill>
+                  <a:schemeClr val="tx2"/>
+                </a:solidFill>
+                <a:latin typeface="+mn-lt"/>
+                <a:ea typeface="+mn-ea"/>
+                <a:cs typeface="+mn-cs"/>
+              </a:defRPr>
+            </a:lvl6pPr>
+            <a:lvl7pPr marL="2200000" indent="-228600" algn="l" defTabSz="457200" rtl="0" eaLnBrk="1" latinLnBrk="0" hangingPunct="1">
+              <a:spcBef>
+                <a:spcPct val="20000"/>
+              </a:spcBef>
+              <a:spcAft>
+                <a:spcPts val="600"/>
+              </a:spcAft>
+              <a:buClr>
+                <a:schemeClr val="accent2"/>
+              </a:buClr>
+              <a:buSzPct val="92000"/>
+              <a:buFont typeface="Wingdings 2" panose="05020102010507070707" pitchFamily="18" charset="2"/>
+              <a:buChar char=""/>
+              <a:defRPr sz="1200" kern="1200">
+                <a:solidFill>
+                  <a:schemeClr val="tx2"/>
+                </a:solidFill>
+                <a:latin typeface="+mn-lt"/>
+                <a:ea typeface="+mn-ea"/>
+                <a:cs typeface="+mn-cs"/>
+              </a:defRPr>
+            </a:lvl7pPr>
+            <a:lvl8pPr marL="2500000" indent="-228600" algn="l" defTabSz="457200" rtl="0" eaLnBrk="1" latinLnBrk="0" hangingPunct="1">
+              <a:spcBef>
+                <a:spcPct val="20000"/>
+              </a:spcBef>
+              <a:spcAft>
+                <a:spcPts val="600"/>
+              </a:spcAft>
+              <a:buClr>
+                <a:schemeClr val="accent2"/>
+              </a:buClr>
+              <a:buSzPct val="92000"/>
+              <a:buFont typeface="Wingdings 2" panose="05020102010507070707" pitchFamily="18" charset="2"/>
+              <a:buChar char=""/>
+              <a:defRPr sz="1200" kern="1200">
+                <a:solidFill>
+                  <a:schemeClr val="tx2"/>
+                </a:solidFill>
+                <a:latin typeface="+mn-lt"/>
+                <a:ea typeface="+mn-ea"/>
+                <a:cs typeface="+mn-cs"/>
+              </a:defRPr>
+            </a:lvl8pPr>
+            <a:lvl9pPr marL="2800000" indent="-228600" algn="l" defTabSz="457200" rtl="0" eaLnBrk="1" latinLnBrk="0" hangingPunct="1">
+              <a:spcBef>
+                <a:spcPct val="20000"/>
+              </a:spcBef>
+              <a:spcAft>
+                <a:spcPts val="600"/>
+              </a:spcAft>
+              <a:buClr>
+                <a:schemeClr val="accent2"/>
+              </a:buClr>
+              <a:buSzPct val="92000"/>
+              <a:buFont typeface="Wingdings 2" panose="05020102010507070707" pitchFamily="18" charset="2"/>
+              <a:buChar char=""/>
+              <a:defRPr sz="1200" kern="1200">
+                <a:solidFill>
+                  <a:schemeClr val="tx2"/>
+                </a:solidFill>
+                <a:latin typeface="+mn-lt"/>
+                <a:ea typeface="+mn-ea"/>
+                <a:cs typeface="+mn-cs"/>
+              </a:defRPr>
+            </a:lvl9pPr>
+          </a:lstStyle>
+          <a:p>
+            <a:pPr marL="0" indent="0">
+              <a:buFont typeface="Wingdings 2" panose="05020102010507070707" pitchFamily="18" charset="2"/>
+              <a:buNone/>
+            </a:pPr>
+            <a:r>
+              <a:rPr lang="en-US" b="1" dirty="0"/>
+              <a:t>Goal: </a:t>
+            </a:r>
+          </a:p>
+          <a:p>
+            <a:pPr marL="305435" indent="-305435"/>
+            <a:r>
+              <a:rPr lang="en-US" dirty="0">
+                <a:ea typeface="+mn-lt"/>
+                <a:cs typeface="+mn-lt"/>
+              </a:rPr>
+              <a:t>Create new Priority 1 Response &amp; Resolution SLA Definitions</a:t>
+            </a:r>
+          </a:p>
+          <a:p>
+            <a:pPr marL="305435" indent="-305435"/>
+            <a:r>
+              <a:rPr lang="en-US" dirty="0">
+                <a:ea typeface="+mn-lt"/>
+                <a:cs typeface="+mn-lt"/>
+              </a:rPr>
+              <a:t>Create a new schedule</a:t>
+            </a:r>
+          </a:p>
+        </p:txBody>
+      </p:sp>
+    </p:spTree>
+    <p:extLst>
+      <p:ext uri="{BB962C8B-B14F-4D97-AF65-F5344CB8AC3E}">
+        <p14:creationId xmlns:p14="http://schemas.microsoft.com/office/powerpoint/2010/main" val="3144947058"/>
+      </p:ext>
+    </p:extLst>
+  </p:cSld>
+  <p:clrMapOvr>
+    <a:masterClrMapping/>
+  </p:clrMapOvr>
+</p:sld>
+</file>
+
 <file path=ppt/slides/slide2.xml><?xml version="1.0" encoding="utf-8"?>
 <p:sld xmlns:a="http://schemas.openxmlformats.org/drawingml/2006/main" xmlns:r="http://schemas.openxmlformats.org/officeDocument/2006/relationships" xmlns:p="http://schemas.openxmlformats.org/presentationml/2006/main">
   <p:cSld>
@@ -4664,7 +5080,7 @@
           <a:p>
             <a:r>
               <a:rPr lang="en-US" dirty="0"/>
-              <a:t>These records are generated when one of our SLA Definitions is met </a:t>
+              <a:t>These records are generated when one of our SLA Definitions are met </a:t>
             </a:r>
           </a:p>
         </p:txBody>
@@ -5107,13 +5523,7 @@
   <p:cSld>
     <p:spTree>
       <p:nvGrpSpPr>
-        <p:cNvPr id="1" name="">
-          <a:extLst>
-            <a:ext uri="{FF2B5EF4-FFF2-40B4-BE49-F238E27FC236}">
-              <a16:creationId xmlns:a16="http://schemas.microsoft.com/office/drawing/2014/main" id="{7367D0CA-F9AE-B516-2C0A-2E32C66DC8CD}"/>
-            </a:ext>
-          </a:extLst>
-        </p:cNvPr>
+        <p:cNvPr id="1" name=""/>
         <p:cNvGrpSpPr/>
         <p:nvPr/>
       </p:nvGrpSpPr>
@@ -5130,7 +5540,7 @@
           <p:cNvPr id="2" name="Title 1">
             <a:extLst>
               <a:ext uri="{FF2B5EF4-FFF2-40B4-BE49-F238E27FC236}">
-                <a16:creationId xmlns:a16="http://schemas.microsoft.com/office/drawing/2014/main" id="{171FA3AC-F63D-52E2-BB9C-6ACFF627BEC8}"/>
+                <a16:creationId xmlns:a16="http://schemas.microsoft.com/office/drawing/2014/main" id="{ED9CFFFD-190F-08B4-495D-EF9811D4463A}"/>
               </a:ext>
             </a:extLst>
           </p:cNvPr>
@@ -5148,358 +5558,162 @@
           <a:p>
             <a:r>
               <a:rPr lang="en-US" dirty="0"/>
-              <a:t>Challenge</a:t>
-            </a:r>
-          </a:p>
-        </p:txBody>
-      </p:sp>
-      <p:sp>
-        <p:nvSpPr>
-          <p:cNvPr id="3" name="Content Placeholder 2">
+              <a:t>Child Schedules &amp; Holidays</a:t>
+            </a:r>
+          </a:p>
+        </p:txBody>
+      </p:sp>
+      <p:pic>
+        <p:nvPicPr>
+          <p:cNvPr id="5" name="Picture 4">
             <a:extLst>
               <a:ext uri="{FF2B5EF4-FFF2-40B4-BE49-F238E27FC236}">
-                <a16:creationId xmlns:a16="http://schemas.microsoft.com/office/drawing/2014/main" id="{83576976-544E-D66E-5CE1-3C91D93ED6AE}"/>
+                <a16:creationId xmlns:a16="http://schemas.microsoft.com/office/drawing/2014/main" id="{64E305C9-B00B-B72C-C238-235786EA1E80}"/>
               </a:ext>
             </a:extLst>
           </p:cNvPr>
-          <p:cNvSpPr>
-            <a:spLocks noGrp="1"/>
-          </p:cNvSpPr>
-          <p:nvPr>
-            <p:ph idx="1"/>
-          </p:nvPr>
-        </p:nvSpPr>
-        <p:spPr>
-          <a:xfrm>
-            <a:off x="6418730" y="2388699"/>
-            <a:ext cx="5192079" cy="3021895"/>
-          </a:xfrm>
-        </p:spPr>
-        <p:txBody>
-          <a:bodyPr>
-            <a:normAutofit fontScale="92500" lnSpcReduction="10000"/>
-          </a:bodyPr>
-          <a:lstStyle/>
-          <a:p>
-            <a:pPr marL="0" indent="0">
-              <a:buNone/>
-            </a:pPr>
-            <a:r>
-              <a:rPr lang="en-US" b="1" dirty="0"/>
-              <a:t>Scenario: </a:t>
-            </a:r>
-          </a:p>
-          <a:p>
-            <a:pPr marL="305435" indent="-305435"/>
-            <a:r>
-              <a:rPr lang="en-US" dirty="0">
-                <a:ea typeface="+mn-lt"/>
-                <a:cs typeface="+mn-lt"/>
-              </a:rPr>
-              <a:t>Create a Response and Resolution for priority 1 incidents</a:t>
-            </a:r>
-          </a:p>
-          <a:p>
-            <a:pPr marL="305435" indent="-305435"/>
-            <a:r>
-              <a:rPr lang="en-US" dirty="0">
-                <a:ea typeface="+mn-lt"/>
-                <a:cs typeface="+mn-lt"/>
-              </a:rPr>
-              <a:t>Response = 30 minutes</a:t>
-            </a:r>
-          </a:p>
-          <a:p>
-            <a:pPr marL="305435" indent="-305435"/>
-            <a:r>
-              <a:rPr lang="en-US" dirty="0">
-                <a:ea typeface="+mn-lt"/>
-                <a:cs typeface="+mn-lt"/>
-              </a:rPr>
-              <a:t>Resolution = 1 hour 30 minutes</a:t>
-            </a:r>
-          </a:p>
-          <a:p>
-            <a:pPr marL="305435" indent="-305435"/>
-            <a:r>
-              <a:rPr lang="en-US" dirty="0">
-                <a:ea typeface="+mn-lt"/>
-                <a:cs typeface="+mn-lt"/>
-              </a:rPr>
-              <a:t>Be sure to properly put the SLA on hold, and close it, when needed</a:t>
-            </a:r>
-            <a:endParaRPr lang="en-US" b="1" dirty="0">
-              <a:ea typeface="+mn-lt"/>
-              <a:cs typeface="+mn-lt"/>
-            </a:endParaRPr>
-          </a:p>
-          <a:p>
-            <a:pPr marL="305435" indent="-305435"/>
-            <a:r>
-              <a:rPr lang="en-US" dirty="0">
-                <a:ea typeface="+mn-lt"/>
-                <a:cs typeface="+mn-lt"/>
-              </a:rPr>
-              <a:t>Create a new 9-4 weekday schedule that excludes the nearest holiday (Diwali) </a:t>
-            </a:r>
-          </a:p>
-        </p:txBody>
-      </p:sp>
-      <p:sp>
-        <p:nvSpPr>
-          <p:cNvPr id="4" name="Content Placeholder 2">
+          <p:cNvPicPr>
+            <a:picLocks noChangeAspect="1"/>
+          </p:cNvPicPr>
+          <p:nvPr/>
+        </p:nvPicPr>
+        <p:blipFill>
+          <a:blip r:embed="rId2"/>
+          <a:stretch>
+            <a:fillRect/>
+          </a:stretch>
+        </p:blipFill>
+        <p:spPr>
+          <a:xfrm>
+            <a:off x="413294" y="3397624"/>
+            <a:ext cx="4915586" cy="876422"/>
+          </a:xfrm>
+          <a:prstGeom prst="rect">
+            <a:avLst/>
+          </a:prstGeom>
+        </p:spPr>
+      </p:pic>
+      <p:pic>
+        <p:nvPicPr>
+          <p:cNvPr id="7" name="Picture 6">
             <a:extLst>
               <a:ext uri="{FF2B5EF4-FFF2-40B4-BE49-F238E27FC236}">
-                <a16:creationId xmlns:a16="http://schemas.microsoft.com/office/drawing/2014/main" id="{5278BB07-8A9D-0F81-F7D8-908F197B3356}"/>
+                <a16:creationId xmlns:a16="http://schemas.microsoft.com/office/drawing/2014/main" id="{C43C1F10-1E38-0149-D660-285D51D3AFF5}"/>
               </a:ext>
             </a:extLst>
           </p:cNvPr>
-          <p:cNvSpPr txBox="1">
-            <a:spLocks/>
-          </p:cNvSpPr>
+          <p:cNvPicPr>
+            <a:picLocks noChangeAspect="1"/>
+          </p:cNvPicPr>
           <p:nvPr/>
-        </p:nvSpPr>
-        <p:spPr>
-          <a:xfrm>
-            <a:off x="903922" y="2415199"/>
-            <a:ext cx="4869350" cy="1484448"/>
+        </p:nvPicPr>
+        <p:blipFill>
+          <a:blip r:embed="rId3"/>
+          <a:stretch>
+            <a:fillRect/>
+          </a:stretch>
+        </p:blipFill>
+        <p:spPr>
+          <a:xfrm>
+            <a:off x="937242" y="4522319"/>
+            <a:ext cx="3867690" cy="2019582"/>
           </a:xfrm>
           <a:prstGeom prst="rect">
             <a:avLst/>
           </a:prstGeom>
         </p:spPr>
-        <p:txBody>
-          <a:bodyPr vert="horz" lIns="91440" tIns="45720" rIns="91440" bIns="45720" rtlCol="0" anchor="ctr">
-            <a:normAutofit/>
+      </p:pic>
+      <p:pic>
+        <p:nvPicPr>
+          <p:cNvPr id="9" name="Picture 8">
+            <a:extLst>
+              <a:ext uri="{FF2B5EF4-FFF2-40B4-BE49-F238E27FC236}">
+                <a16:creationId xmlns:a16="http://schemas.microsoft.com/office/drawing/2014/main" id="{E20AD689-A9E5-C826-2451-D8B4EDAB33A6}"/>
+              </a:ext>
+            </a:extLst>
+          </p:cNvPr>
+          <p:cNvPicPr>
+            <a:picLocks noChangeAspect="1"/>
+          </p:cNvPicPr>
+          <p:nvPr/>
+        </p:nvPicPr>
+        <p:blipFill>
+          <a:blip r:embed="rId4"/>
+          <a:stretch>
+            <a:fillRect/>
+          </a:stretch>
+        </p:blipFill>
+        <p:spPr>
+          <a:xfrm>
+            <a:off x="8397363" y="3040386"/>
+            <a:ext cx="2981741" cy="1590897"/>
+          </a:xfrm>
+          <a:prstGeom prst="rect">
+            <a:avLst/>
+          </a:prstGeom>
+        </p:spPr>
+      </p:pic>
+      <p:pic>
+        <p:nvPicPr>
+          <p:cNvPr id="12" name="Picture 11">
+            <a:extLst>
+              <a:ext uri="{FF2B5EF4-FFF2-40B4-BE49-F238E27FC236}">
+                <a16:creationId xmlns:a16="http://schemas.microsoft.com/office/drawing/2014/main" id="{A12AE066-124A-F426-91C9-F0D73A1AFF6C}"/>
+              </a:ext>
+            </a:extLst>
+          </p:cNvPr>
+          <p:cNvPicPr>
+            <a:picLocks noChangeAspect="1"/>
+          </p:cNvPicPr>
+          <p:nvPr/>
+        </p:nvPicPr>
+        <p:blipFill>
+          <a:blip r:embed="rId5"/>
+          <a:stretch>
+            <a:fillRect/>
+          </a:stretch>
+        </p:blipFill>
+        <p:spPr>
+          <a:xfrm>
+            <a:off x="5655545" y="2850582"/>
+            <a:ext cx="2415153" cy="3842290"/>
+          </a:xfrm>
+          <a:prstGeom prst="rect">
+            <a:avLst/>
+          </a:prstGeom>
+        </p:spPr>
+      </p:pic>
+      <p:sp>
+        <p:nvSpPr>
+          <p:cNvPr id="13" name="TextBox 12">
+            <a:extLst>
+              <a:ext uri="{FF2B5EF4-FFF2-40B4-BE49-F238E27FC236}">
+                <a16:creationId xmlns:a16="http://schemas.microsoft.com/office/drawing/2014/main" id="{C36CC25E-1F00-7F55-FF97-FC4406298507}"/>
+              </a:ext>
+            </a:extLst>
+          </p:cNvPr>
+          <p:cNvSpPr txBox="1"/>
+          <p:nvPr/>
+        </p:nvSpPr>
+        <p:spPr>
+          <a:xfrm>
+            <a:off x="2422494" y="2098603"/>
+            <a:ext cx="7873759" cy="369332"/>
+          </a:xfrm>
+          <a:prstGeom prst="rect">
+            <a:avLst/>
+          </a:prstGeom>
+          <a:noFill/>
+        </p:spPr>
+        <p:txBody>
+          <a:bodyPr wrap="none" rtlCol="0">
+            <a:spAutoFit/>
           </a:bodyPr>
-          <a:lstStyle>
-            <a:lvl1pPr marL="306000" indent="-306000" algn="l" defTabSz="457200" rtl="0" eaLnBrk="1" latinLnBrk="0" hangingPunct="1">
-              <a:spcBef>
-                <a:spcPct val="20000"/>
-              </a:spcBef>
-              <a:spcAft>
-                <a:spcPts val="600"/>
-              </a:spcAft>
-              <a:buClr>
-                <a:schemeClr val="accent2"/>
-              </a:buClr>
-              <a:buSzPct val="92000"/>
-              <a:buFont typeface="Wingdings 2" panose="05020102010507070707" pitchFamily="18" charset="2"/>
-              <a:buChar char=""/>
-              <a:defRPr sz="1800" kern="1200">
-                <a:solidFill>
-                  <a:schemeClr val="tx2"/>
-                </a:solidFill>
-                <a:latin typeface="+mn-lt"/>
-                <a:ea typeface="+mn-ea"/>
-                <a:cs typeface="+mn-cs"/>
-              </a:defRPr>
-            </a:lvl1pPr>
-            <a:lvl2pPr marL="630000" indent="-306000" algn="l" defTabSz="457200" rtl="0" eaLnBrk="1" latinLnBrk="0" hangingPunct="1">
-              <a:spcBef>
-                <a:spcPct val="20000"/>
-              </a:spcBef>
-              <a:spcAft>
-                <a:spcPts val="600"/>
-              </a:spcAft>
-              <a:buClr>
-                <a:schemeClr val="accent2"/>
-              </a:buClr>
-              <a:buSzPct val="92000"/>
-              <a:buFont typeface="Wingdings 2" panose="05020102010507070707" pitchFamily="18" charset="2"/>
-              <a:buChar char=""/>
-              <a:defRPr sz="1600" kern="1200">
-                <a:solidFill>
-                  <a:schemeClr val="tx2"/>
-                </a:solidFill>
-                <a:latin typeface="+mn-lt"/>
-                <a:ea typeface="+mn-ea"/>
-                <a:cs typeface="+mn-cs"/>
-              </a:defRPr>
-            </a:lvl2pPr>
-            <a:lvl3pPr marL="900000" indent="-270000" algn="l" defTabSz="457200" rtl="0" eaLnBrk="1" latinLnBrk="0" hangingPunct="1">
-              <a:spcBef>
-                <a:spcPct val="20000"/>
-              </a:spcBef>
-              <a:spcAft>
-                <a:spcPts val="600"/>
-              </a:spcAft>
-              <a:buClr>
-                <a:schemeClr val="accent2"/>
-              </a:buClr>
-              <a:buSzPct val="92000"/>
-              <a:buFont typeface="Wingdings 2" panose="05020102010507070707" pitchFamily="18" charset="2"/>
-              <a:buChar char=""/>
-              <a:defRPr sz="1400" kern="1200">
-                <a:solidFill>
-                  <a:schemeClr val="tx2"/>
-                </a:solidFill>
-                <a:latin typeface="+mn-lt"/>
-                <a:ea typeface="+mn-ea"/>
-                <a:cs typeface="+mn-cs"/>
-              </a:defRPr>
-            </a:lvl3pPr>
-            <a:lvl4pPr marL="1242000" indent="-234000" algn="l" defTabSz="457200" rtl="0" eaLnBrk="1" latinLnBrk="0" hangingPunct="1">
-              <a:spcBef>
-                <a:spcPct val="20000"/>
-              </a:spcBef>
-              <a:spcAft>
-                <a:spcPts val="600"/>
-              </a:spcAft>
-              <a:buClr>
-                <a:schemeClr val="accent2"/>
-              </a:buClr>
-              <a:buSzPct val="92000"/>
-              <a:buFont typeface="Wingdings 2" panose="05020102010507070707" pitchFamily="18" charset="2"/>
-              <a:buChar char=""/>
-              <a:defRPr sz="1200" kern="1200">
-                <a:solidFill>
-                  <a:schemeClr val="tx2"/>
-                </a:solidFill>
-                <a:latin typeface="+mn-lt"/>
-                <a:ea typeface="+mn-ea"/>
-                <a:cs typeface="+mn-cs"/>
-              </a:defRPr>
-            </a:lvl4pPr>
-            <a:lvl5pPr marL="1602000" indent="-234000" algn="l" defTabSz="457200" rtl="0" eaLnBrk="1" latinLnBrk="0" hangingPunct="1">
-              <a:spcBef>
-                <a:spcPct val="20000"/>
-              </a:spcBef>
-              <a:spcAft>
-                <a:spcPts val="600"/>
-              </a:spcAft>
-              <a:buClr>
-                <a:schemeClr val="accent2"/>
-              </a:buClr>
-              <a:buSzPct val="92000"/>
-              <a:buFont typeface="Wingdings 2" panose="05020102010507070707" pitchFamily="18" charset="2"/>
-              <a:buChar char=""/>
-              <a:defRPr sz="1200" kern="1200">
-                <a:solidFill>
-                  <a:schemeClr val="tx2"/>
-                </a:solidFill>
-                <a:latin typeface="+mn-lt"/>
-                <a:ea typeface="+mn-ea"/>
-                <a:cs typeface="+mn-cs"/>
-              </a:defRPr>
-            </a:lvl5pPr>
-            <a:lvl6pPr marL="1900000" indent="-228600" algn="l" defTabSz="457200" rtl="0" eaLnBrk="1" latinLnBrk="0" hangingPunct="1">
-              <a:spcBef>
-                <a:spcPct val="20000"/>
-              </a:spcBef>
-              <a:spcAft>
-                <a:spcPts val="600"/>
-              </a:spcAft>
-              <a:buClr>
-                <a:schemeClr val="accent2"/>
-              </a:buClr>
-              <a:buSzPct val="92000"/>
-              <a:buFont typeface="Wingdings 2" panose="05020102010507070707" pitchFamily="18" charset="2"/>
-              <a:buChar char=""/>
-              <a:defRPr sz="1200" kern="1200">
-                <a:solidFill>
-                  <a:schemeClr val="tx2"/>
-                </a:solidFill>
-                <a:latin typeface="+mn-lt"/>
-                <a:ea typeface="+mn-ea"/>
-                <a:cs typeface="+mn-cs"/>
-              </a:defRPr>
-            </a:lvl6pPr>
-            <a:lvl7pPr marL="2200000" indent="-228600" algn="l" defTabSz="457200" rtl="0" eaLnBrk="1" latinLnBrk="0" hangingPunct="1">
-              <a:spcBef>
-                <a:spcPct val="20000"/>
-              </a:spcBef>
-              <a:spcAft>
-                <a:spcPts val="600"/>
-              </a:spcAft>
-              <a:buClr>
-                <a:schemeClr val="accent2"/>
-              </a:buClr>
-              <a:buSzPct val="92000"/>
-              <a:buFont typeface="Wingdings 2" panose="05020102010507070707" pitchFamily="18" charset="2"/>
-              <a:buChar char=""/>
-              <a:defRPr sz="1200" kern="1200">
-                <a:solidFill>
-                  <a:schemeClr val="tx2"/>
-                </a:solidFill>
-                <a:latin typeface="+mn-lt"/>
-                <a:ea typeface="+mn-ea"/>
-                <a:cs typeface="+mn-cs"/>
-              </a:defRPr>
-            </a:lvl7pPr>
-            <a:lvl8pPr marL="2500000" indent="-228600" algn="l" defTabSz="457200" rtl="0" eaLnBrk="1" latinLnBrk="0" hangingPunct="1">
-              <a:spcBef>
-                <a:spcPct val="20000"/>
-              </a:spcBef>
-              <a:spcAft>
-                <a:spcPts val="600"/>
-              </a:spcAft>
-              <a:buClr>
-                <a:schemeClr val="accent2"/>
-              </a:buClr>
-              <a:buSzPct val="92000"/>
-              <a:buFont typeface="Wingdings 2" panose="05020102010507070707" pitchFamily="18" charset="2"/>
-              <a:buChar char=""/>
-              <a:defRPr sz="1200" kern="1200">
-                <a:solidFill>
-                  <a:schemeClr val="tx2"/>
-                </a:solidFill>
-                <a:latin typeface="+mn-lt"/>
-                <a:ea typeface="+mn-ea"/>
-                <a:cs typeface="+mn-cs"/>
-              </a:defRPr>
-            </a:lvl8pPr>
-            <a:lvl9pPr marL="2800000" indent="-228600" algn="l" defTabSz="457200" rtl="0" eaLnBrk="1" latinLnBrk="0" hangingPunct="1">
-              <a:spcBef>
-                <a:spcPct val="20000"/>
-              </a:spcBef>
-              <a:spcAft>
-                <a:spcPts val="600"/>
-              </a:spcAft>
-              <a:buClr>
-                <a:schemeClr val="accent2"/>
-              </a:buClr>
-              <a:buSzPct val="92000"/>
-              <a:buFont typeface="Wingdings 2" panose="05020102010507070707" pitchFamily="18" charset="2"/>
-              <a:buChar char=""/>
-              <a:defRPr sz="1200" kern="1200">
-                <a:solidFill>
-                  <a:schemeClr val="tx2"/>
-                </a:solidFill>
-                <a:latin typeface="+mn-lt"/>
-                <a:ea typeface="+mn-ea"/>
-                <a:cs typeface="+mn-cs"/>
-              </a:defRPr>
-            </a:lvl9pPr>
-          </a:lstStyle>
-          <a:p>
-            <a:pPr marL="0" indent="0">
-              <a:buFont typeface="Wingdings 2" panose="05020102010507070707" pitchFamily="18" charset="2"/>
-              <a:buNone/>
-            </a:pPr>
-            <a:r>
-              <a:rPr lang="en-US" b="1" dirty="0"/>
-              <a:t>Goal: </a:t>
-            </a:r>
-          </a:p>
-          <a:p>
-            <a:pPr marL="305435" indent="-305435"/>
-            <a:r>
-              <a:rPr lang="en-US" dirty="0">
-                <a:ea typeface="+mn-lt"/>
-                <a:cs typeface="+mn-lt"/>
-              </a:rPr>
-              <a:t>Create new Priority 1 Response &amp; Resolution SLA Definitions</a:t>
-            </a:r>
-          </a:p>
-          <a:p>
-            <a:pPr marL="305435" indent="-305435"/>
-            <a:r>
-              <a:rPr lang="en-US" dirty="0">
-                <a:ea typeface="+mn-lt"/>
-                <a:cs typeface="+mn-lt"/>
-              </a:rPr>
-              <a:t>Create a new schedule</a:t>
+          <a:lstStyle/>
+          <a:p>
+            <a:r>
+              <a:rPr lang="en-US" dirty="0"/>
+              <a:t>8-5 weekdays excluding holidays &gt; U.S. Holidays &gt; Christmas Day (Excluded, Busy)</a:t>
             </a:r>
           </a:p>
         </p:txBody>
@@ -5507,7 +5721,7 @@
     </p:spTree>
     <p:extLst>
       <p:ext uri="{BB962C8B-B14F-4D97-AF65-F5344CB8AC3E}">
-        <p14:creationId xmlns:p14="http://schemas.microsoft.com/office/powerpoint/2010/main" val="3144947058"/>
+        <p14:creationId xmlns:p14="http://schemas.microsoft.com/office/powerpoint/2010/main" val="1472837234"/>
       </p:ext>
     </p:extLst>
   </p:cSld>
